--- a/Introduccion a la Ingenieria/Clases/Clase 14 - Preparacion de la presentacion final/Presentacion.pptx
+++ b/Introduccion a la Ingenieria/Clases/Clase 14 - Preparacion de la presentacion final/Presentacion.pptx
@@ -5995,7 +5995,7 @@
               </a:spcAft>
             </a:pPr>
             <a:r>
-              <a:rPr sz="1600" b="0" i="0">
+              <a:rPr sz="2000" b="0" i="0">
                 <a:solidFill>
                   <a:srgbClr val="333333"/>
                 </a:solidFill>
@@ -6004,7 +6004,7 @@
               <a:t>–   </a:t>
             </a:r>
             <a:r>
-              <a:rPr sz="1600" b="1" i="0">
+              <a:rPr sz="2000" b="1" i="0">
                 <a:solidFill>
                   <a:srgbClr val="333333"/>
                 </a:solidFill>
@@ -6013,7 +6013,7 @@
               <a:t>Trabajo dirigido:</a:t>
             </a:r>
             <a:r>
-              <a:rPr sz="1600" b="0" i="0">
+              <a:rPr sz="2000" b="0" i="0">
                 <a:solidFill>
                   <a:srgbClr val="333333"/>
                 </a:solidFill>
@@ -6029,7 +6029,7 @@
               </a:spcAft>
             </a:pPr>
             <a:r>
-              <a:rPr sz="1600" b="0" i="0">
+              <a:rPr sz="2000" b="0" i="0">
                 <a:solidFill>
                   <a:srgbClr val="333333"/>
                 </a:solidFill>
@@ -6038,7 +6038,7 @@
               <a:t>–   </a:t>
             </a:r>
             <a:r>
-              <a:rPr sz="1600" b="1" i="0">
+              <a:rPr sz="2000" b="1" i="0">
                 <a:solidFill>
                   <a:srgbClr val="333333"/>
                 </a:solidFill>
@@ -6047,7 +6047,7 @@
               <a:t>Trabajo independiente:</a:t>
             </a:r>
             <a:r>
-              <a:rPr sz="1600" b="0" i="0">
+              <a:rPr sz="2000" b="0" i="0">
                 <a:solidFill>
                   <a:srgbClr val="333333"/>
                 </a:solidFill>
@@ -6056,7 +6056,7 @@
               <a:t> Ensayo general: ensayar </a:t>
             </a:r>
             <a:r>
-              <a:rPr sz="1600" b="1" i="0">
+              <a:rPr sz="2000" b="1" i="0">
                 <a:solidFill>
                   <a:srgbClr val="333333"/>
                 </a:solidFill>
@@ -6065,7 +6065,7 @@
               <a:t>los nueve minutos completos, hablando y con cronómetro, al menos dos veces</a:t>
             </a:r>
             <a:r>
-              <a:rPr sz="1600" b="0" i="0">
+              <a:rPr sz="2000" b="0" i="0">
                 <a:solidFill>
                   <a:srgbClr val="333333"/>
                 </a:solidFill>
@@ -6081,7 +6081,7 @@
               </a:spcAft>
             </a:pPr>
             <a:r>
-              <a:rPr sz="1600" b="0" i="0">
+              <a:rPr sz="2000" b="0" i="0">
                 <a:solidFill>
                   <a:srgbClr val="333333"/>
                 </a:solidFill>
@@ -6090,7 +6090,7 @@
               <a:t>–   </a:t>
             </a:r>
             <a:r>
-              <a:rPr sz="1600" b="1" i="0">
+              <a:rPr sz="2000" b="1" i="0">
                 <a:solidFill>
                   <a:srgbClr val="333333"/>
                 </a:solidFill>
@@ -6099,7 +6099,7 @@
               <a:t>Sesión 15 · Exposición final de proyectos</a:t>
             </a:r>
             <a:r>
-              <a:rPr sz="1600" b="0" i="0">
+              <a:rPr sz="2000" b="0" i="0">
                 <a:solidFill>
                   <a:srgbClr val="333333"/>
                 </a:solidFill>
@@ -6108,7 +6108,7 @@
               <a:t> — es la </a:t>
             </a:r>
             <a:r>
-              <a:rPr sz="1600" b="1" i="0">
+              <a:rPr sz="2000" b="1" i="0">
                 <a:solidFill>
                   <a:srgbClr val="333333"/>
                 </a:solidFill>
@@ -6117,7 +6117,7 @@
               <a:t>exposición final</a:t>
             </a:r>
             <a:r>
-              <a:rPr sz="1600" b="0" i="0">
+              <a:rPr sz="2000" b="0" i="0">
                 <a:solidFill>
                   <a:srgbClr val="333333"/>
                 </a:solidFill>
@@ -6126,7 +6126,7 @@
               <a:t>, con nota: nueve minutos por equipo y tres de preguntas. Vale el </a:t>
             </a:r>
             <a:r>
-              <a:rPr sz="1600" b="1" i="0">
+              <a:rPr sz="2000" b="1" i="0">
                 <a:solidFill>
                   <a:srgbClr val="333333"/>
                 </a:solidFill>
@@ -6135,7 +6135,7 @@
               <a:t>15 %</a:t>
             </a:r>
             <a:r>
-              <a:rPr sz="1600" b="0" i="0">
+              <a:rPr sz="2000" b="0" i="0">
                 <a:solidFill>
                   <a:srgbClr val="333333"/>
                 </a:solidFill>
@@ -6151,7 +6151,7 @@
               </a:spcAft>
             </a:pPr>
             <a:r>
-              <a:rPr sz="1600" b="0" i="0">
+              <a:rPr sz="2000" b="0" i="0">
                 <a:solidFill>
                   <a:srgbClr val="333333"/>
                 </a:solidFill>
@@ -6160,7 +6160,7 @@
               <a:t>–   </a:t>
             </a:r>
             <a:r>
-              <a:rPr sz="1600" b="1" i="0">
+              <a:rPr sz="2000" b="1" i="0">
                 <a:solidFill>
                   <a:srgbClr val="333333"/>
                 </a:solidFill>
@@ -6169,7 +6169,7 @@
               <a:t>Aviso:</a:t>
             </a:r>
             <a:r>
-              <a:rPr sz="1600" b="0" i="0">
+              <a:rPr sz="2000" b="0" i="0">
                 <a:solidFill>
                   <a:srgbClr val="333333"/>
                 </a:solidFill>
@@ -6178,7 +6178,7 @@
               <a:t> En la sesión 15 </a:t>
             </a:r>
             <a:r>
-              <a:rPr sz="1600" b="1" i="0">
+              <a:rPr sz="2000" b="1" i="0">
                 <a:solidFill>
                   <a:srgbClr val="333333"/>
                 </a:solidFill>
@@ -6187,7 +6187,7 @@
               <a:t>se corta a los nueve minutos</a:t>
             </a:r>
             <a:r>
-              <a:rPr sz="1600" b="0" i="0">
+              <a:rPr sz="2000" b="0" i="0">
                 <a:solidFill>
                   <a:srgbClr val="333333"/>
                 </a:solidFill>
@@ -6203,7 +6203,7 @@
               </a:spcAft>
             </a:pPr>
             <a:r>
-              <a:rPr sz="1600" b="0" i="0">
+              <a:rPr sz="2000" b="0" i="0">
                 <a:solidFill>
                   <a:srgbClr val="333333"/>
                 </a:solidFill>
@@ -6212,7 +6212,7 @@
               <a:t>–   </a:t>
             </a:r>
             <a:r>
-              <a:rPr sz="1600" b="1" i="0">
+              <a:rPr sz="2000" b="1" i="0">
                 <a:solidFill>
                   <a:srgbClr val="333333"/>
                 </a:solidFill>
@@ -6221,7 +6221,7 @@
               <a:t>Antes de salir:</a:t>
             </a:r>
             <a:r>
-              <a:rPr sz="1600" b="0" i="0">
+              <a:rPr sz="2000" b="0" i="0">
                 <a:solidFill>
                   <a:srgbClr val="333333"/>
                 </a:solidFill>
@@ -6795,7 +6795,7 @@
         <p:spPr>
           <a:xfrm>
             <a:off x="502920" y="2798064"/>
-            <a:ext cx="2164019" cy="2560320"/>
+            <a:ext cx="2164019" cy="3099816"/>
           </a:xfrm>
           <a:prstGeom prst="rect">
             <a:avLst/>
@@ -6910,7 +6910,7 @@
         <p:spPr>
           <a:xfrm>
             <a:off x="2758379" y="2798064"/>
-            <a:ext cx="2164019" cy="2560320"/>
+            <a:ext cx="2164019" cy="3099816"/>
           </a:xfrm>
           <a:prstGeom prst="rect">
             <a:avLst/>
@@ -7025,7 +7025,7 @@
         <p:spPr>
           <a:xfrm>
             <a:off x="5013838" y="2798064"/>
-            <a:ext cx="2164019" cy="2560320"/>
+            <a:ext cx="2164019" cy="3099816"/>
           </a:xfrm>
           <a:prstGeom prst="rect">
             <a:avLst/>
@@ -7140,7 +7140,7 @@
         <p:spPr>
           <a:xfrm>
             <a:off x="7269297" y="2798064"/>
-            <a:ext cx="2164019" cy="2560320"/>
+            <a:ext cx="2164019" cy="3099816"/>
           </a:xfrm>
           <a:prstGeom prst="rect">
             <a:avLst/>
@@ -7255,7 +7255,7 @@
         <p:spPr>
           <a:xfrm>
             <a:off x="9524756" y="2798064"/>
-            <a:ext cx="2164019" cy="2560320"/>
+            <a:ext cx="2164019" cy="3099816"/>
           </a:xfrm>
           <a:prstGeom prst="rect">
             <a:avLst/>
@@ -7289,8 +7289,8 @@
         </p:nvSpPr>
         <p:spPr>
           <a:xfrm>
-            <a:off x="457200" y="5943600"/>
-            <a:ext cx="11277295" cy="365760"/>
+            <a:off x="457200" y="5806440"/>
+            <a:ext cx="11277295" cy="640080"/>
           </a:xfrm>
           <a:prstGeom prst="rect">
             <a:avLst/>
@@ -7305,7 +7305,7 @@
           <a:p>
             <a:pPr algn="ctr"/>
             <a:r>
-              <a:rPr sz="1200" b="1" i="1">
+              <a:rPr sz="1100" b="1" i="1">
                 <a:solidFill>
                   <a:srgbClr val="666666"/>
                 </a:solidFill>
@@ -7314,7 +7314,7 @@
               <a:t>El bloque de exposiciones de hoy es un ensayo</a:t>
             </a:r>
             <a:r>
-              <a:rPr sz="1200" b="0" i="1">
+              <a:rPr sz="1100" b="0" i="1">
                 <a:solidFill>
                   <a:srgbClr val="666666"/>
                 </a:solidFill>
@@ -7323,7 +7323,7 @@
               <a:t>, no una presentación: cada equipo ensaya </a:t>
             </a:r>
             <a:r>
-              <a:rPr sz="1200" b="1" i="1">
+              <a:rPr sz="1100" b="1" i="1">
                 <a:solidFill>
                   <a:srgbClr val="666666"/>
                 </a:solidFill>
@@ -7332,7 +7332,7 @@
               <a:t>los primeros 4 minutos</a:t>
             </a:r>
             <a:r>
-              <a:rPr sz="1200" b="0" i="1">
+              <a:rPr sz="1100" b="0" i="1">
                 <a:solidFill>
                   <a:srgbClr val="666666"/>
                 </a:solidFill>
@@ -7341,7 +7341,7 @@
               <a:t> frente al cronómetro y recibe 2 minutos de corrección. Se ensaya solo el arranque porque </a:t>
             </a:r>
             <a:r>
-              <a:rPr sz="1200" b="1" i="1">
+              <a:rPr sz="1100" b="1" i="1">
                 <a:solidFill>
                   <a:srgbClr val="666666"/>
                 </a:solidFill>
@@ -7350,7 +7350,7 @@
               <a:t>es donde todos los equipos se pasan de tiempo</a:t>
             </a:r>
             <a:r>
-              <a:rPr sz="1200" b="0" i="1">
+              <a:rPr sz="1100" b="0" i="1">
                 <a:solidFill>
                   <a:srgbClr val="666666"/>
                 </a:solidFill>
@@ -7570,7 +7570,7 @@
               </a:spcAft>
             </a:pPr>
             <a:r>
-              <a:rPr sz="1600" b="0" i="0">
+              <a:rPr sz="2000" b="0" i="0">
                 <a:solidFill>
                   <a:srgbClr val="333333"/>
                 </a:solidFill>
@@ -7579,7 +7579,7 @@
               <a:t>–   Armar un guion de </a:t>
             </a:r>
             <a:r>
-              <a:rPr sz="1600" b="1" i="0">
+              <a:rPr sz="2000" b="1" i="0">
                 <a:solidFill>
                   <a:srgbClr val="333333"/>
                 </a:solidFill>
@@ -7588,7 +7588,7 @@
               <a:t>nueve minutos en cinco tramos</a:t>
             </a:r>
             <a:r>
-              <a:rPr sz="1600" b="0" i="0">
+              <a:rPr sz="2000" b="0" i="0">
                 <a:solidFill>
                   <a:srgbClr val="333333"/>
                 </a:solidFill>
@@ -7604,7 +7604,7 @@
               </a:spcAft>
             </a:pPr>
             <a:r>
-              <a:rPr sz="1600" b="0" i="0">
+              <a:rPr sz="2000" b="0" i="0">
                 <a:solidFill>
                   <a:srgbClr val="333333"/>
                 </a:solidFill>
@@ -7613,7 +7613,7 @@
               <a:t>–   Hacer diapositivas que </a:t>
             </a:r>
             <a:r>
-              <a:rPr sz="1600" b="1" i="0">
+              <a:rPr sz="2000" b="1" i="0">
                 <a:solidFill>
                   <a:srgbClr val="333333"/>
                 </a:solidFill>
@@ -7622,7 +7622,7 @@
               <a:t>se miren</a:t>
             </a:r>
             <a:r>
-              <a:rPr sz="1600" b="0" i="0">
+              <a:rPr sz="2000" b="0" i="0">
                 <a:solidFill>
                   <a:srgbClr val="333333"/>
                 </a:solidFill>
@@ -7638,7 +7638,7 @@
               </a:spcAft>
             </a:pPr>
             <a:r>
-              <a:rPr sz="1600" b="0" i="0">
+              <a:rPr sz="2000" b="0" i="0">
                 <a:solidFill>
                   <a:srgbClr val="333333"/>
                 </a:solidFill>
@@ -7647,7 +7647,7 @@
               <a:t>–   Repartir la presentación entre los integrantes, con </a:t>
             </a:r>
             <a:r>
-              <a:rPr sz="1600" b="1" i="0">
+              <a:rPr sz="2000" b="1" i="0">
                 <a:solidFill>
                   <a:srgbClr val="333333"/>
                 </a:solidFill>
@@ -7656,7 +7656,7 @@
               <a:t>tarea para quien no habla</a:t>
             </a:r>
             <a:r>
-              <a:rPr sz="1600" b="0" i="0">
+              <a:rPr sz="2000" b="0" i="0">
                 <a:solidFill>
                   <a:srgbClr val="333333"/>
                 </a:solidFill>
@@ -7672,7 +7672,7 @@
               </a:spcAft>
             </a:pPr>
             <a:r>
-              <a:rPr sz="1600" b="0" i="0">
+              <a:rPr sz="2000" b="0" i="0">
                 <a:solidFill>
                   <a:srgbClr val="333333"/>
                 </a:solidFill>
@@ -7681,7 +7681,7 @@
               <a:t>–   Preparar la </a:t>
             </a:r>
             <a:r>
-              <a:rPr sz="1600" b="1" i="0">
+              <a:rPr sz="2000" b="1" i="0">
                 <a:solidFill>
                   <a:srgbClr val="333333"/>
                 </a:solidFill>
@@ -7690,7 +7690,7 @@
               <a:t>demostración del prototipo</a:t>
             </a:r>
             <a:r>
-              <a:rPr sz="1600" b="0" i="0">
+              <a:rPr sz="2000" b="0" i="0">
                 <a:solidFill>
                   <a:srgbClr val="333333"/>
                 </a:solidFill>
@@ -7699,7 +7699,7 @@
               <a:t> y su </a:t>
             </a:r>
             <a:r>
-              <a:rPr sz="1600" b="1" i="0">
+              <a:rPr sz="2000" b="1" i="0">
                 <a:solidFill>
                   <a:srgbClr val="333333"/>
                 </a:solidFill>
@@ -7708,7 +7708,7 @@
               <a:t>plan B</a:t>
             </a:r>
             <a:r>
-              <a:rPr sz="1600" b="0" i="0">
+              <a:rPr sz="2000" b="0" i="0">
                 <a:solidFill>
                   <a:srgbClr val="333333"/>
                 </a:solidFill>
@@ -8372,7 +8372,7 @@
           <a:lstStyle/>
           <a:p>
             <a:r>
-              <a:rPr sz="1500" b="1" i="0">
+              <a:rPr sz="1400" b="1" i="0">
                 <a:solidFill>
                   <a:srgbClr val="095292"/>
                 </a:solidFill>
@@ -8388,7 +8388,7 @@
               </a:spcBef>
             </a:pPr>
             <a:r>
-              <a:rPr sz="1300" b="0" i="0">
+              <a:rPr sz="1200" b="0" i="0">
                 <a:solidFill>
                   <a:srgbClr val="333333"/>
                 </a:solidFill>
@@ -8397,7 +8397,7 @@
               <a:t>Una frase y un número: «4 de cada 10 visitas terminan sin préstamo». </a:t>
             </a:r>
             <a:r>
-              <a:rPr sz="1300" b="1" i="0">
+              <a:rPr sz="1200" b="1" i="0">
                 <a:solidFill>
                   <a:srgbClr val="333333"/>
                 </a:solidFill>
@@ -8406,7 +8406,7 @@
               <a:t>Sin rodeos y sin presentaciones personales</a:t>
             </a:r>
             <a:r>
-              <a:rPr sz="1300" b="0" i="0">
+              <a:rPr sz="1200" b="0" i="0">
                 <a:solidFill>
                   <a:srgbClr val="333333"/>
                 </a:solidFill>
@@ -11077,7 +11077,7 @@
               </a:spcAft>
             </a:pPr>
             <a:r>
-              <a:rPr sz="1300" b="0" i="0">
+              <a:rPr sz="1500" b="0" i="0">
                 <a:solidFill>
                   <a:srgbClr val="333333"/>
                 </a:solidFill>
@@ -11093,7 +11093,7 @@
               </a:spcAft>
             </a:pPr>
             <a:r>
-              <a:rPr sz="1300" b="0" i="0">
+              <a:rPr sz="1500" b="0" i="0">
                 <a:solidFill>
                   <a:srgbClr val="333333"/>
                 </a:solidFill>
@@ -11109,7 +11109,7 @@
               </a:spcAft>
             </a:pPr>
             <a:r>
-              <a:rPr sz="1300" b="0" i="0">
+              <a:rPr sz="1500" b="0" i="0">
                 <a:solidFill>
                   <a:srgbClr val="333333"/>
                 </a:solidFill>
@@ -11125,7 +11125,7 @@
               </a:spcAft>
             </a:pPr>
             <a:r>
-              <a:rPr sz="1300" b="0" i="0">
+              <a:rPr sz="1500" b="0" i="0">
                 <a:solidFill>
                   <a:srgbClr val="333333"/>
                 </a:solidFill>
@@ -11141,7 +11141,7 @@
               </a:spcAft>
             </a:pPr>
             <a:r>
-              <a:rPr sz="1300" b="0" i="0">
+              <a:rPr sz="1500" b="0" i="0">
                 <a:solidFill>
                   <a:srgbClr val="333333"/>
                 </a:solidFill>
@@ -11301,7 +11301,7 @@
               </a:spcAft>
             </a:pPr>
             <a:r>
-              <a:rPr sz="1300" b="0" i="0">
+              <a:rPr sz="1500" b="0" i="0">
                 <a:solidFill>
                   <a:srgbClr val="333333"/>
                 </a:solidFill>
@@ -11310,7 +11310,7 @@
               <a:t>–   Título: «</a:t>
             </a:r>
             <a:r>
-              <a:rPr sz="1300" b="1" i="0">
+              <a:rPr sz="1500" b="1" i="0">
                 <a:solidFill>
                   <a:srgbClr val="333333"/>
                 </a:solidFill>
@@ -11319,7 +11319,7 @@
               <a:t>4 de cada 10 visitas terminan sin préstamo</a:t>
             </a:r>
             <a:r>
-              <a:rPr sz="1300" b="0" i="0">
+              <a:rPr sz="1500" b="0" i="0">
                 <a:solidFill>
                   <a:srgbClr val="333333"/>
                 </a:solidFill>
@@ -11335,7 +11335,7 @@
               </a:spcAft>
             </a:pPr>
             <a:r>
-              <a:rPr sz="1300" b="0" i="0">
+              <a:rPr sz="1500" b="0" i="0">
                 <a:solidFill>
                   <a:srgbClr val="333333"/>
                 </a:solidFill>
@@ -11344,7 +11344,7 @@
               <a:t>–   Tres viñetas de </a:t>
             </a:r>
             <a:r>
-              <a:rPr sz="1300" b="1" i="0">
+              <a:rPr sz="1500" b="1" i="0">
                 <a:solidFill>
                   <a:srgbClr val="333333"/>
                 </a:solidFill>
@@ -11353,7 +11353,7 @@
               <a:t>cinco palabras</a:t>
             </a:r>
             <a:r>
-              <a:rPr sz="1300" b="0" i="0">
+              <a:rPr sz="1500" b="0" i="0">
                 <a:solidFill>
                   <a:srgbClr val="333333"/>
                 </a:solidFill>
@@ -11369,7 +11369,7 @@
               </a:spcAft>
             </a:pPr>
             <a:r>
-              <a:rPr sz="1300" b="0" i="0">
+              <a:rPr sz="1500" b="0" i="0">
                 <a:solidFill>
                   <a:srgbClr val="333333"/>
                 </a:solidFill>
@@ -11385,7 +11385,7 @@
               </a:spcAft>
             </a:pPr>
             <a:r>
-              <a:rPr sz="1300" b="0" i="0">
+              <a:rPr sz="1500" b="0" i="0">
                 <a:solidFill>
                   <a:srgbClr val="333333"/>
                 </a:solidFill>
@@ -11394,7 +11394,7 @@
               <a:t>–   </a:t>
             </a:r>
             <a:r>
-              <a:rPr sz="1300" b="1" i="0">
+              <a:rPr sz="1500" b="1" i="0">
                 <a:solidFill>
                   <a:srgbClr val="333333"/>
                 </a:solidFill>
@@ -11403,7 +11403,7 @@
               <a:t>Solo las dos alternativas y el ganador</a:t>
             </a:r>
             <a:r>
-              <a:rPr sz="1300" b="0" i="0">
+              <a:rPr sz="1500" b="0" i="0">
                 <a:solidFill>
                   <a:srgbClr val="333333"/>
                 </a:solidFill>
@@ -11419,7 +11419,7 @@
               </a:spcAft>
             </a:pPr>
             <a:r>
-              <a:rPr sz="1300" b="0" i="0">
+              <a:rPr sz="1500" b="0" i="0">
                 <a:solidFill>
                   <a:srgbClr val="333333"/>
                 </a:solidFill>
@@ -11428,7 +11428,7 @@
               <a:t>–   Letra grande: si no cabe, </a:t>
             </a:r>
             <a:r>
-              <a:rPr sz="1300" b="1" i="0">
+              <a:rPr sz="1500" b="1" i="0">
                 <a:solidFill>
                   <a:srgbClr val="333333"/>
                 </a:solidFill>
@@ -11437,7 +11437,7 @@
               <a:t>es que hay que quitar contenido</a:t>
             </a:r>
             <a:r>
-              <a:rPr sz="1300" b="0" i="0">
+              <a:rPr sz="1500" b="0" i="0">
                 <a:solidFill>
                   <a:srgbClr val="333333"/>
                 </a:solidFill>

--- a/Introduccion a la Ingenieria/Clases/Clase 14 - Preparacion de la presentacion final/Presentacion.pptx
+++ b/Introduccion a la Ingenieria/Clases/Clase 14 - Preparacion de la presentacion final/Presentacion.pptx
@@ -5592,7 +5592,7 @@
                 </a:solidFill>
                 <a:latin typeface="Calibri"/>
               </a:rPr>
-              <a:t>Se corta en mitad de la frase. En la sesión 15 pasa igual.</a:t>
+              <a:t>Se corta en mitad de la frase. En la Clase 15 pasa igual.</a:t>
             </a:r>
           </a:p>
         </p:txBody>
@@ -5962,7 +5962,7 @@
                 </a:solidFill>
                 <a:latin typeface="Calibri"/>
               </a:rPr>
-              <a:t>Para la sesión 15</a:t>
+              <a:t>Para la Clase 15</a:t>
             </a:r>
           </a:p>
         </p:txBody>
@@ -6096,7 +6096,7 @@
                 </a:solidFill>
                 <a:latin typeface="Calibri"/>
               </a:rPr>
-              <a:t>Sesión 15 · Exposición final de proyectos</a:t>
+              <a:t>Clase 15 · Exposición final de proyectos</a:t>
             </a:r>
             <a:r>
               <a:rPr sz="2000" b="0" i="0">
@@ -6175,7 +6175,7 @@
                 </a:solidFill>
                 <a:latin typeface="Calibri"/>
               </a:rPr>
-              <a:t> En la sesión 15 </a:t>
+              <a:t> En la Clase 15 </a:t>
             </a:r>
             <a:r>
               <a:rPr sz="2000" b="1" i="0">
@@ -6388,7 +6388,7 @@
                 </a:solidFill>
                 <a:latin typeface="Calibri"/>
               </a:rPr>
-              <a:t>Nos vemos en la sesión 15</a:t>
+              <a:t>Nos vemos en la Clase 15</a:t>
             </a:r>
           </a:p>
         </p:txBody>
@@ -7276,7 +7276,7 @@
                 </a:solidFill>
                 <a:latin typeface="Calibri"/>
               </a:rPr>
-              <a:t>Cierre — Lo que falta antes de la sesión 15</a:t>
+              <a:t>Cierre — Lo que falta antes de la Clase 15</a:t>
             </a:r>
           </a:p>
         </p:txBody>
@@ -7356,7 +7356,7 @@
                 </a:solidFill>
                 <a:latin typeface="Calibri"/>
               </a:rPr>
-              <a:t>: quien controla los primeros cuatro minutos casi siempre llega bien al final. El resto se ensaya en equipo, fuera de clase, antes de la sesión 15.</a:t>
+              <a:t>: quien controla los primeros cuatro minutos casi siempre llega bien al final. El resto se ensaya en equipo, fuera de clase, antes de la Clase 15.</a:t>
             </a:r>
           </a:p>
         </p:txBody>
@@ -7953,7 +7953,7 @@
                 </a:solidFill>
                 <a:latin typeface="Calibri"/>
               </a:rPr>
-              <a:t>En la sesión 15 tienen nueve minutos y se corta al llegar a cero. ¿Cuánto creen que dura contar el problema, los actores y el árbol de causas?</a:t>
+              <a:t>En la Clase 15 tienen nueve minutos y se corta al llegar a cero. ¿Cuánto creen que dura contar el problema, los actores y el árbol de causas?</a:t>
             </a:r>
           </a:p>
         </p:txBody>
